--- a/fixtures/sample-group-scale.pptx
+++ b/fixtures/sample-group-scale.pptx
@@ -7,6 +7,10 @@
   <p:sldIdLst>
     <p:sldId id="256" r:id="rId2"/>
     <p:sldId id="257" r:id="rId3"/>
+    <p:sldId id="258" r:id="rId4"/>
+    <p:sldId id="259" r:id="rId5"/>
+    <p:sldId id="260" r:id="rId6"/>
+    <p:sldId id="261" r:id="rId7"/>
   </p:sldIdLst>
   <p:sldSz cx="12192000" cy="6858000"/>
   <p:notesSz cx="6858000" cy="9144000"/>
@@ -224,6 +228,495 @@
                 <a:rPr sz="2400"/>
                 <a:t>Work in pairs. Compare your answers to Exercise 9.</a:t>
               </a:r>
+            </a:p>
+          </p:txBody>
+        </p:sp>
+      </p:grpSp>
+    </p:spTree>
+  </p:cSld>
+  <p:clrMapOvr>
+    <a:masterClrMapping/>
+  </p:clrMapOvr>
+</p:sld>
+</file>
+
+<file path=ppt/slides/slide3.xml><?xml version="1.0" encoding="utf-8"?>
+<p:sld xmlns:a="http://schemas.openxmlformats.org/drawingml/2006/main" xmlns:r="http://schemas.openxmlformats.org/officeDocument/2006/relationships" xmlns:p="http://schemas.openxmlformats.org/presentationml/2006/main">
+  <p:cSld>
+    <p:spTree>
+      <p:nvGrpSpPr>
+        <p:cNvPr id="1" name=""/>
+        <p:cNvGrpSpPr/>
+        <p:nvPr/>
+      </p:nvGrpSpPr>
+      <p:grpSpPr>
+        <a:xfrm>
+          <a:off x="0" y="0"/>
+          <a:ext cx="0" cy="0"/>
+          <a:chOff x="0" y="0"/>
+          <a:chExt cx="0" cy="0"/>
+        </a:xfrm>
+      </p:grpSpPr>
+      <p:grpSp>
+        <p:nvGrpSpPr>
+          <p:cNvPr id="105" name="归一化描边组合"/>
+          <p:cNvGrpSpPr/>
+          <p:nvPr/>
+        </p:nvGrpSpPr>
+        <p:grpSpPr>
+          <a:xfrm>
+            <a:off x="952500" y="1143000"/>
+            <a:ext cx="6096000" cy="3048000"/>
+            <a:chOff x="0" y="0"/>
+            <a:chExt cx="9525" cy="4763"/>
+          </a:xfrm>
+        </p:grpSpPr>
+        <p:sp>
+          <p:nvSpPr>
+            <p:cNvPr id="103" name="归一化描边矩形"/>
+            <p:cNvSpPr/>
+            <p:nvPr/>
+          </p:nvSpPr>
+          <p:spPr>
+            <a:xfrm>
+              <a:off x="0" y="0"/>
+              <a:ext cx="9525" cy="4763"/>
+            </a:xfrm>
+            <a:prstGeom prst="roundRect">
+              <a:avLst/>
+            </a:prstGeom>
+            <a:solidFill>
+              <a:srgbClr val="FDE7F3"/>
+            </a:solidFill>
+            <a:ln w="28575">
+              <a:solidFill>
+                <a:srgbClr val="C2185B"/>
+              </a:solidFill>
+            </a:ln>
+          </p:spPr>
+          <p:txBody>
+            <a:bodyPr anchor="ctr"/>
+            <a:lstStyle/>
+            <a:p>
+              <a:pPr algn="ctr"/>
+              <a:r>
+                <a:rPr sz="2400"/>
+                <a:t>3px stroke · 24pt</a:t>
+              </a:r>
+            </a:p>
+          </p:txBody>
+        </p:sp>
+        <p:sp>
+          <p:nvSpPr>
+            <p:cNvPr id="104" name="归一化直线"/>
+            <p:cNvSpPr/>
+            <p:nvPr/>
+          </p:nvSpPr>
+          <p:spPr>
+            <a:xfrm>
+              <a:off x="476" y="4001"/>
+              <a:ext cx="8573" cy="0"/>
+            </a:xfrm>
+            <a:prstGeom prst="line">
+              <a:avLst/>
+            </a:prstGeom>
+            <a:ln w="19050">
+              <a:solidFill>
+                <a:srgbClr val="1F3864"/>
+              </a:solidFill>
+            </a:ln>
+          </p:spPr>
+          <p:txBody>
+            <a:bodyPr anchor="ctr"/>
+            <a:lstStyle/>
+            <a:p>
+              <a:endParaRPr/>
+            </a:p>
+          </p:txBody>
+        </p:sp>
+      </p:grpSp>
+    </p:spTree>
+  </p:cSld>
+  <p:clrMapOvr>
+    <a:masterClrMapping/>
+  </p:clrMapOvr>
+</p:sld>
+</file>
+
+<file path=ppt/slides/slide4.xml><?xml version="1.0" encoding="utf-8"?>
+<p:sld xmlns:a="http://schemas.openxmlformats.org/drawingml/2006/main" xmlns:r="http://schemas.openxmlformats.org/officeDocument/2006/relationships" xmlns:p="http://schemas.openxmlformats.org/presentationml/2006/main">
+  <p:cSld>
+    <p:spTree>
+      <p:nvGrpSpPr>
+        <p:cNvPr id="1" name=""/>
+        <p:cNvGrpSpPr/>
+        <p:nvPr/>
+      </p:nvGrpSpPr>
+      <p:grpSpPr>
+        <a:xfrm>
+          <a:off x="0" y="0"/>
+          <a:ext cx="0" cy="0"/>
+          <a:chOff x="0" y="0"/>
+          <a:chExt cx="0" cy="0"/>
+        </a:xfrm>
+      </p:grpSpPr>
+      <p:grpSp>
+        <p:nvGrpSpPr>
+          <p:cNvPr id="107" name="1.5 倍组合"/>
+          <p:cNvGrpSpPr/>
+          <p:nvPr/>
+        </p:nvGrpSpPr>
+        <p:grpSpPr>
+          <a:xfrm>
+            <a:off x="762000" y="1143000"/>
+            <a:ext cx="4286250" cy="2143125"/>
+            <a:chOff x="381000" y="285750"/>
+            <a:chExt cx="2857500" cy="1428750"/>
+          </a:xfrm>
+        </p:grpSpPr>
+        <p:sp>
+          <p:nvSpPr>
+            <p:cNvPr id="106" name="缩放组合内形状"/>
+            <p:cNvSpPr/>
+            <p:nvPr/>
+          </p:nvSpPr>
+          <p:spPr>
+            <a:xfrm>
+              <a:off x="381000" y="285750"/>
+              <a:ext cx="2857500" cy="1428750"/>
+            </a:xfrm>
+            <a:prstGeom prst="rect">
+              <a:avLst/>
+            </a:prstGeom>
+            <a:solidFill>
+              <a:srgbClr val="E2F0D9"/>
+            </a:solidFill>
+            <a:ln w="57150">
+              <a:solidFill>
+                <a:srgbClr val="385723"/>
+              </a:solidFill>
+            </a:ln>
+            <a:effectLst>
+              <a:outerShdw blurRad="76200" dist="57150" dir="2700000" algn="tl" rotWithShape="0">
+                <a:srgbClr val="000000">
+                  <a:alpha val="40000"/>
+                </a:srgbClr>
+              </a:outerShdw>
+            </a:effectLst>
+          </p:spPr>
+          <p:txBody>
+            <a:bodyPr anchor="ctr"/>
+            <a:lstStyle/>
+            <a:p>
+              <a:pPr algn="ctr"/>
+              <a:r>
+                <a:rPr sz="2400"/>
+                <a:t>6px · 24pt</a:t>
+              </a:r>
+            </a:p>
+          </p:txBody>
+        </p:sp>
+      </p:grpSp>
+      <p:sp>
+        <p:nvSpPr>
+          <p:cNvPr id="108" name="对照形状"/>
+          <p:cNvSpPr/>
+          <p:nvPr/>
+        </p:nvSpPr>
+        <p:spPr>
+          <a:xfrm>
+            <a:off x="6477000" y="1143000"/>
+            <a:ext cx="4286250" cy="2143125"/>
+          </a:xfrm>
+          <a:prstGeom prst="rect">
+            <a:avLst/>
+          </a:prstGeom>
+          <a:solidFill>
+            <a:srgbClr val="E2F0D9"/>
+          </a:solidFill>
+          <a:ln w="57150">
+            <a:solidFill>
+              <a:srgbClr val="385723"/>
+            </a:solidFill>
+          </a:ln>
+          <a:effectLst>
+            <a:outerShdw blurRad="76200" dist="57150" dir="2700000" algn="tl" rotWithShape="0">
+              <a:srgbClr val="000000">
+                <a:alpha val="40000"/>
+              </a:srgbClr>
+            </a:outerShdw>
+          </a:effectLst>
+        </p:spPr>
+        <p:txBody>
+          <a:bodyPr anchor="ctr"/>
+          <a:lstStyle/>
+          <a:p>
+            <a:pPr algn="ctr"/>
+            <a:r>
+              <a:rPr sz="2400"/>
+              <a:t>6px · 24pt</a:t>
+            </a:r>
+          </a:p>
+        </p:txBody>
+      </p:sp>
+    </p:spTree>
+  </p:cSld>
+  <p:clrMapOvr>
+    <a:masterClrMapping/>
+  </p:clrMapOvr>
+</p:sld>
+</file>
+
+<file path=ppt/slides/slide5.xml><?xml version="1.0" encoding="utf-8"?>
+<p:sld xmlns:a="http://schemas.openxmlformats.org/drawingml/2006/main" xmlns:r="http://schemas.openxmlformats.org/officeDocument/2006/relationships" xmlns:p="http://schemas.openxmlformats.org/presentationml/2006/main">
+  <p:cSld>
+    <p:spTree>
+      <p:nvGrpSpPr>
+        <p:cNvPr id="1" name=""/>
+        <p:cNvGrpSpPr/>
+        <p:nvPr/>
+      </p:nvGrpSpPr>
+      <p:grpSpPr>
+        <a:xfrm>
+          <a:off x="0" y="0"/>
+          <a:ext cx="0" cy="0"/>
+          <a:chOff x="0" y="0"/>
+          <a:chExt cx="0" cy="0"/>
+        </a:xfrm>
+      </p:grpSpPr>
+      <p:grpSp>
+        <p:nvGrpSpPr>
+          <p:cNvPr id="111" name="外层组合"/>
+          <p:cNvGrpSpPr/>
+          <p:nvPr/>
+        </p:nvGrpSpPr>
+        <p:grpSpPr>
+          <a:xfrm>
+            <a:off x="762000" y="952500"/>
+            <a:ext cx="5334000" cy="2667000"/>
+            <a:chOff x="0" y="0"/>
+            <a:chExt cx="2667000" cy="1333500"/>
+          </a:xfrm>
+        </p:grpSpPr>
+        <p:grpSp>
+          <p:nvGrpSpPr>
+            <p:cNvPr id="110" name="内层组合"/>
+            <p:cNvGrpSpPr/>
+            <p:nvPr/>
+          </p:nvGrpSpPr>
+          <p:grpSpPr>
+            <a:xfrm>
+              <a:off x="190500" y="190500"/>
+              <a:ext cx="2286000" cy="952500"/>
+              <a:chOff x="476250" y="476250"/>
+              <a:chExt cx="4572000" cy="1905000"/>
+            </a:xfrm>
+          </p:grpSpPr>
+          <p:sp>
+            <p:nvSpPr>
+              <p:cNvPr id="109" name="嵌套叶节点"/>
+              <p:cNvSpPr/>
+              <p:nvPr/>
+            </p:nvSpPr>
+            <p:spPr>
+              <a:xfrm>
+                <a:off x="476250" y="476250"/>
+                <a:ext cx="4572000" cy="1905000"/>
+              </a:xfrm>
+              <a:prstGeom prst="ellipse">
+                <a:avLst/>
+              </a:prstGeom>
+              <a:solidFill>
+                <a:srgbClr val="FFF2CC"/>
+              </a:solidFill>
+              <a:ln w="38100">
+                <a:solidFill>
+                  <a:srgbClr val="BF9000"/>
+                </a:solidFill>
+              </a:ln>
+            </p:spPr>
+            <p:txBody>
+              <a:bodyPr anchor="ctr"/>
+              <a:lstStyle/>
+              <a:p>
+                <a:pPr algn="ctr"/>
+                <a:r>
+                  <a:rPr sz="2000"/>
+                  <a:t>nested 4px · 20pt</a:t>
+                </a:r>
+              </a:p>
+            </p:txBody>
+          </p:sp>
+        </p:grpSp>
+      </p:grpSp>
+      <p:sp>
+        <p:nvSpPr>
+          <p:cNvPr id="112" name="嵌套对照形状"/>
+          <p:cNvSpPr/>
+          <p:nvPr/>
+        </p:nvSpPr>
+        <p:spPr>
+          <a:xfrm>
+            <a:off x="6477000" y="1333500"/>
+            <a:ext cx="4572000" cy="1905000"/>
+          </a:xfrm>
+          <a:prstGeom prst="ellipse">
+            <a:avLst/>
+          </a:prstGeom>
+          <a:solidFill>
+            <a:srgbClr val="FFF2CC"/>
+          </a:solidFill>
+          <a:ln w="38100">
+            <a:solidFill>
+              <a:srgbClr val="BF9000"/>
+            </a:solidFill>
+          </a:ln>
+        </p:spPr>
+        <p:txBody>
+          <a:bodyPr anchor="ctr"/>
+          <a:lstStyle/>
+          <a:p>
+            <a:pPr algn="ctr"/>
+            <a:r>
+              <a:rPr sz="2000"/>
+              <a:t>nested 4px · 20pt</a:t>
+            </a:r>
+          </a:p>
+        </p:txBody>
+      </p:sp>
+    </p:spTree>
+  </p:cSld>
+  <p:clrMapOvr>
+    <a:masterClrMapping/>
+  </p:clrMapOvr>
+</p:sld>
+</file>
+
+<file path=ppt/slides/slide6.xml><?xml version="1.0" encoding="utf-8"?>
+<p:sld xmlns:a="http://schemas.openxmlformats.org/drawingml/2006/main" xmlns:r="http://schemas.openxmlformats.org/officeDocument/2006/relationships" xmlns:p="http://schemas.openxmlformats.org/presentationml/2006/main">
+  <p:cSld>
+    <p:spTree>
+      <p:nvGrpSpPr>
+        <p:cNvPr id="1" name=""/>
+        <p:cNvGrpSpPr/>
+        <p:nvPr/>
+      </p:nvGrpSpPr>
+      <p:grpSpPr>
+        <a:xfrm>
+          <a:off x="0" y="0"/>
+          <a:ext cx="0" cy="0"/>
+          <a:chOff x="0" y="0"/>
+          <a:chExt cx="0" cy="0"/>
+        </a:xfrm>
+      </p:grpSpPr>
+      <p:grpSp>
+        <p:nvGrpSpPr>
+          <p:cNvPr id="116" name="旋转翻转组合"/>
+          <p:cNvGrpSpPr/>
+          <p:nvPr/>
+        </p:nvGrpSpPr>
+        <p:grpSpPr>
+          <a:xfrm rot="1200000" flipH="1">
+            <a:off x="2667000" y="1714500"/>
+            <a:ext cx="5715000" cy="2857500"/>
+            <a:chOff x="0" y="0"/>
+            <a:chExt cx="3810000" cy="3810000"/>
+          </a:xfrm>
+        </p:grpSpPr>
+        <p:sp>
+          <p:nvSpPr>
+            <p:cNvPr id="113" name="箭头"/>
+            <p:cNvSpPr/>
+            <p:nvPr/>
+          </p:nvSpPr>
+          <p:spPr>
+            <a:xfrm>
+              <a:off x="190500" y="190500"/>
+              <a:ext cx="2476500" cy="1047750"/>
+            </a:xfrm>
+            <a:prstGeom prst="rightArrow">
+              <a:avLst/>
+            </a:prstGeom>
+            <a:solidFill>
+              <a:srgbClr val="DEEBF7"/>
+            </a:solidFill>
+            <a:ln w="28575">
+              <a:solidFill>
+                <a:srgbClr val="2E75B6"/>
+              </a:solidFill>
+            </a:ln>
+          </p:spPr>
+          <p:txBody>
+            <a:bodyPr anchor="ctr"/>
+            <a:lstStyle/>
+            <a:p>
+              <a:pPr algn="ctr"/>
+              <a:r>
+                <a:rPr sz="1800"/>
+                <a:t>flip</a:t>
+              </a:r>
+            </a:p>
+          </p:txBody>
+        </p:sp>
+        <p:sp>
+          <p:nvSpPr>
+            <p:cNvPr id="114" name="30° 子元素"/>
+            <p:cNvSpPr/>
+            <p:nvPr/>
+          </p:nvSpPr>
+          <p:spPr>
+            <a:xfrm rot="1800000">
+              <a:off x="381000" y="1905000"/>
+              <a:ext cx="1905000" cy="762000"/>
+            </a:xfrm>
+            <a:prstGeom prst="rect">
+              <a:avLst/>
+            </a:prstGeom>
+            <a:solidFill>
+              <a:srgbClr val="FBE5D6"/>
+            </a:solidFill>
+            <a:ln w="28575">
+              <a:solidFill>
+                <a:srgbClr val="C55A11"/>
+              </a:solidFill>
+            </a:ln>
+          </p:spPr>
+          <p:txBody>
+            <a:bodyPr anchor="ctr"/>
+            <a:lstStyle/>
+            <a:p>
+              <a:endParaRPr/>
+            </a:p>
+          </p:txBody>
+        </p:sp>
+        <p:sp>
+          <p:nvSpPr>
+            <p:cNvPr id="115" name="120° 子元素"/>
+            <p:cNvSpPr/>
+            <p:nvPr/>
+          </p:nvSpPr>
+          <p:spPr>
+            <a:xfrm rot="7200000">
+              <a:off x="2095500" y="2095500"/>
+              <a:ext cx="1905000" cy="762000"/>
+            </a:xfrm>
+            <a:prstGeom prst="rect">
+              <a:avLst/>
+            </a:prstGeom>
+            <a:solidFill>
+              <a:srgbClr val="E2F0D9"/>
+            </a:solidFill>
+            <a:ln w="28575">
+              <a:solidFill>
+                <a:srgbClr val="548235"/>
+              </a:solidFill>
+            </a:ln>
+          </p:spPr>
+          <p:txBody>
+            <a:bodyPr anchor="ctr"/>
+            <a:lstStyle/>
+            <a:p>
+              <a:endParaRPr/>
             </a:p>
           </p:txBody>
         </p:sp>
